--- a/ゲーム科1年/00_前期/ゲームプログラミングⅠ/08_ファイル分け.pptx
+++ b/ゲーム科1年/00_前期/ゲームプログラミングⅠ/08_ファイル分け.pptx
@@ -271,7 +271,7 @@
           <a:p>
             <a:fld id="{E9CC885B-4903-4D54-9A93-00025F12DED9}" type="datetimeFigureOut">
               <a:rPr kumimoji="1" lang="ja-JP" altLang="en-US" smtClean="0"/>
-              <a:t>2024/9/4</a:t>
+              <a:t>2025/1/6</a:t>
             </a:fld>
             <a:endParaRPr kumimoji="1" lang="ja-JP" altLang="en-US"/>
           </a:p>
@@ -501,7 +501,7 @@
           <a:p>
             <a:fld id="{E9CC885B-4903-4D54-9A93-00025F12DED9}" type="datetimeFigureOut">
               <a:rPr kumimoji="1" lang="ja-JP" altLang="en-US" smtClean="0"/>
-              <a:t>2024/9/4</a:t>
+              <a:t>2025/1/6</a:t>
             </a:fld>
             <a:endParaRPr kumimoji="1" lang="ja-JP" altLang="en-US"/>
           </a:p>
@@ -741,7 +741,7 @@
           <a:p>
             <a:fld id="{E9CC885B-4903-4D54-9A93-00025F12DED9}" type="datetimeFigureOut">
               <a:rPr kumimoji="1" lang="ja-JP" altLang="en-US" smtClean="0"/>
-              <a:t>2024/9/4</a:t>
+              <a:t>2025/1/6</a:t>
             </a:fld>
             <a:endParaRPr kumimoji="1" lang="ja-JP" altLang="en-US"/>
           </a:p>
@@ -971,7 +971,7 @@
           <a:p>
             <a:fld id="{E9CC885B-4903-4D54-9A93-00025F12DED9}" type="datetimeFigureOut">
               <a:rPr kumimoji="1" lang="ja-JP" altLang="en-US" smtClean="0"/>
-              <a:t>2024/9/4</a:t>
+              <a:t>2025/1/6</a:t>
             </a:fld>
             <a:endParaRPr kumimoji="1" lang="ja-JP" altLang="en-US"/>
           </a:p>
@@ -1246,7 +1246,7 @@
           <a:p>
             <a:fld id="{E9CC885B-4903-4D54-9A93-00025F12DED9}" type="datetimeFigureOut">
               <a:rPr kumimoji="1" lang="ja-JP" altLang="en-US" smtClean="0"/>
-              <a:t>2024/9/4</a:t>
+              <a:t>2025/1/6</a:t>
             </a:fld>
             <a:endParaRPr kumimoji="1" lang="ja-JP" altLang="en-US"/>
           </a:p>
@@ -1575,7 +1575,7 @@
           <a:p>
             <a:fld id="{E9CC885B-4903-4D54-9A93-00025F12DED9}" type="datetimeFigureOut">
               <a:rPr kumimoji="1" lang="ja-JP" altLang="en-US" smtClean="0"/>
-              <a:t>2024/9/4</a:t>
+              <a:t>2025/1/6</a:t>
             </a:fld>
             <a:endParaRPr kumimoji="1" lang="ja-JP" altLang="en-US"/>
           </a:p>
@@ -2051,7 +2051,7 @@
           <a:p>
             <a:fld id="{E9CC885B-4903-4D54-9A93-00025F12DED9}" type="datetimeFigureOut">
               <a:rPr kumimoji="1" lang="ja-JP" altLang="en-US" smtClean="0"/>
-              <a:t>2024/9/4</a:t>
+              <a:t>2025/1/6</a:t>
             </a:fld>
             <a:endParaRPr kumimoji="1" lang="ja-JP" altLang="en-US"/>
           </a:p>
@@ -2192,7 +2192,7 @@
           <a:p>
             <a:fld id="{E9CC885B-4903-4D54-9A93-00025F12DED9}" type="datetimeFigureOut">
               <a:rPr kumimoji="1" lang="ja-JP" altLang="en-US" smtClean="0"/>
-              <a:t>2024/9/4</a:t>
+              <a:t>2025/1/6</a:t>
             </a:fld>
             <a:endParaRPr kumimoji="1" lang="ja-JP" altLang="en-US"/>
           </a:p>
@@ -2305,7 +2305,7 @@
           <a:p>
             <a:fld id="{E9CC885B-4903-4D54-9A93-00025F12DED9}" type="datetimeFigureOut">
               <a:rPr kumimoji="1" lang="ja-JP" altLang="en-US" smtClean="0"/>
-              <a:t>2024/9/4</a:t>
+              <a:t>2025/1/6</a:t>
             </a:fld>
             <a:endParaRPr kumimoji="1" lang="ja-JP" altLang="en-US"/>
           </a:p>
@@ -2648,7 +2648,7 @@
           <a:p>
             <a:fld id="{E9CC885B-4903-4D54-9A93-00025F12DED9}" type="datetimeFigureOut">
               <a:rPr kumimoji="1" lang="ja-JP" altLang="en-US" smtClean="0"/>
-              <a:t>2024/9/4</a:t>
+              <a:t>2025/1/6</a:t>
             </a:fld>
             <a:endParaRPr kumimoji="1" lang="ja-JP" altLang="en-US"/>
           </a:p>
@@ -2936,7 +2936,7 @@
           <a:p>
             <a:fld id="{E9CC885B-4903-4D54-9A93-00025F12DED9}" type="datetimeFigureOut">
               <a:rPr kumimoji="1" lang="ja-JP" altLang="en-US" smtClean="0"/>
-              <a:t>2024/9/4</a:t>
+              <a:t>2025/1/6</a:t>
             </a:fld>
             <a:endParaRPr kumimoji="1" lang="ja-JP" altLang="en-US"/>
           </a:p>
@@ -3209,7 +3209,7 @@
           <a:p>
             <a:fld id="{E9CC885B-4903-4D54-9A93-00025F12DED9}" type="datetimeFigureOut">
               <a:rPr kumimoji="1" lang="ja-JP" altLang="en-US" smtClean="0"/>
-              <a:t>2024/9/4</a:t>
+              <a:t>2025/1/6</a:t>
             </a:fld>
             <a:endParaRPr kumimoji="1" lang="ja-JP" altLang="en-US"/>
           </a:p>
@@ -5670,10 +5670,10 @@
       </p:sp>
       <p:pic>
         <p:nvPicPr>
-          <p:cNvPr id="3" name="図 2">
-            <a:extLst>
-              <a:ext uri="{FF2B5EF4-FFF2-40B4-BE49-F238E27FC236}">
-                <a16:creationId xmlns:a16="http://schemas.microsoft.com/office/drawing/2014/main" id="{A4C54E15-918A-4CB9-96A1-C37594D58E87}"/>
+          <p:cNvPr id="5" name="図 4">
+            <a:extLst>
+              <a:ext uri="{FF2B5EF4-FFF2-40B4-BE49-F238E27FC236}">
+                <a16:creationId xmlns:a16="http://schemas.microsoft.com/office/drawing/2014/main" id="{96F68CA4-66B5-4B09-BF07-86A0320E6AB4}"/>
               </a:ext>
             </a:extLst>
           </p:cNvPr>
@@ -5683,13 +5683,7 @@
           <p:nvPr/>
         </p:nvPicPr>
         <p:blipFill>
-          <a:blip r:embed="rId2">
-            <a:extLst>
-              <a:ext uri="{28A0092B-C50C-407E-A947-70E740481C1C}">
-                <a14:useLocalDpi xmlns:a14="http://schemas.microsoft.com/office/drawing/2010/main" val="0"/>
-              </a:ext>
-            </a:extLst>
-          </a:blip>
+          <a:blip r:embed="rId2"/>
           <a:stretch>
             <a:fillRect/>
           </a:stretch>
@@ -5697,7 +5691,7 @@
         <p:spPr>
           <a:xfrm>
             <a:off x="567542" y="2187126"/>
-            <a:ext cx="6004703" cy="4048574"/>
+            <a:ext cx="6132611" cy="4374541"/>
           </a:xfrm>
           <a:prstGeom prst="rect">
             <a:avLst/>
@@ -5953,10 +5947,10 @@
       </p:sp>
       <p:pic>
         <p:nvPicPr>
-          <p:cNvPr id="5" name="図 4">
-            <a:extLst>
-              <a:ext uri="{FF2B5EF4-FFF2-40B4-BE49-F238E27FC236}">
-                <a16:creationId xmlns:a16="http://schemas.microsoft.com/office/drawing/2014/main" id="{AF487ECC-35E0-4AA7-8544-FCB56918EEE5}"/>
+          <p:cNvPr id="7" name="図 6">
+            <a:extLst>
+              <a:ext uri="{FF2B5EF4-FFF2-40B4-BE49-F238E27FC236}">
+                <a16:creationId xmlns:a16="http://schemas.microsoft.com/office/drawing/2014/main" id="{8A0853D9-A941-42B4-89F8-15EF98ED5B44}"/>
               </a:ext>
             </a:extLst>
           </p:cNvPr>
@@ -5966,27 +5960,73 @@
           <p:nvPr/>
         </p:nvPicPr>
         <p:blipFill>
-          <a:blip r:embed="rId2">
-            <a:extLst>
-              <a:ext uri="{28A0092B-C50C-407E-A947-70E740481C1C}">
-                <a14:useLocalDpi xmlns:a14="http://schemas.microsoft.com/office/drawing/2010/main" val="0"/>
-              </a:ext>
-            </a:extLst>
-          </a:blip>
+          <a:blip r:embed="rId2"/>
           <a:stretch>
             <a:fillRect/>
           </a:stretch>
         </p:blipFill>
         <p:spPr>
           <a:xfrm>
-            <a:off x="567542" y="4263417"/>
-            <a:ext cx="4448958" cy="2073612"/>
+            <a:off x="567542" y="4403117"/>
+            <a:ext cx="4224591" cy="2079909"/>
           </a:xfrm>
           <a:prstGeom prst="rect">
             <a:avLst/>
           </a:prstGeom>
         </p:spPr>
       </p:pic>
+      <p:sp>
+        <p:nvSpPr>
+          <p:cNvPr id="8" name="正方形/長方形 7">
+            <a:extLst>
+              <a:ext uri="{FF2B5EF4-FFF2-40B4-BE49-F238E27FC236}">
+                <a16:creationId xmlns:a16="http://schemas.microsoft.com/office/drawing/2014/main" id="{DF451C31-46DB-4AE1-B3DC-B8EA0AD07718}"/>
+              </a:ext>
+            </a:extLst>
+          </p:cNvPr>
+          <p:cNvSpPr/>
+          <p:nvPr/>
+        </p:nvSpPr>
+        <p:spPr>
+          <a:xfrm>
+            <a:off x="1377016" y="5925780"/>
+            <a:ext cx="1151466" cy="491067"/>
+          </a:xfrm>
+          <a:prstGeom prst="rect">
+            <a:avLst/>
+          </a:prstGeom>
+          <a:noFill/>
+          <a:ln w="38100">
+            <a:solidFill>
+              <a:srgbClr val="FF0000"/>
+            </a:solidFill>
+          </a:ln>
+        </p:spPr>
+        <p:style>
+          <a:lnRef idx="2">
+            <a:schemeClr val="accent1">
+              <a:shade val="50000"/>
+            </a:schemeClr>
+          </a:lnRef>
+          <a:fillRef idx="1">
+            <a:schemeClr val="accent1"/>
+          </a:fillRef>
+          <a:effectRef idx="0">
+            <a:schemeClr val="accent1"/>
+          </a:effectRef>
+          <a:fontRef idx="minor">
+            <a:schemeClr val="lt1"/>
+          </a:fontRef>
+        </p:style>
+        <p:txBody>
+          <a:bodyPr rtlCol="0" anchor="ctr"/>
+          <a:lstStyle/>
+          <a:p>
+            <a:pPr algn="ctr"/>
+            <a:endParaRPr kumimoji="1" lang="ja-JP" altLang="en-US"/>
+          </a:p>
+        </p:txBody>
+      </p:sp>
     </p:spTree>
     <p:extLst>
       <p:ext uri="{BB962C8B-B14F-4D97-AF65-F5344CB8AC3E}">

--- a/ゲーム科1年/00_前期/ゲームプログラミングⅠ/08_ファイル分け.pptx
+++ b/ゲーム科1年/00_前期/ゲームプログラミングⅠ/08_ファイル分け.pptx
@@ -271,7 +271,7 @@
           <a:p>
             <a:fld id="{E9CC885B-4903-4D54-9A93-00025F12DED9}" type="datetimeFigureOut">
               <a:rPr kumimoji="1" lang="ja-JP" altLang="en-US" smtClean="0"/>
-              <a:t>2025/1/6</a:t>
+              <a:t>2025/3/3</a:t>
             </a:fld>
             <a:endParaRPr kumimoji="1" lang="ja-JP" altLang="en-US"/>
           </a:p>
@@ -501,7 +501,7 @@
           <a:p>
             <a:fld id="{E9CC885B-4903-4D54-9A93-00025F12DED9}" type="datetimeFigureOut">
               <a:rPr kumimoji="1" lang="ja-JP" altLang="en-US" smtClean="0"/>
-              <a:t>2025/1/6</a:t>
+              <a:t>2025/3/3</a:t>
             </a:fld>
             <a:endParaRPr kumimoji="1" lang="ja-JP" altLang="en-US"/>
           </a:p>
@@ -741,7 +741,7 @@
           <a:p>
             <a:fld id="{E9CC885B-4903-4D54-9A93-00025F12DED9}" type="datetimeFigureOut">
               <a:rPr kumimoji="1" lang="ja-JP" altLang="en-US" smtClean="0"/>
-              <a:t>2025/1/6</a:t>
+              <a:t>2025/3/3</a:t>
             </a:fld>
             <a:endParaRPr kumimoji="1" lang="ja-JP" altLang="en-US"/>
           </a:p>
@@ -971,7 +971,7 @@
           <a:p>
             <a:fld id="{E9CC885B-4903-4D54-9A93-00025F12DED9}" type="datetimeFigureOut">
               <a:rPr kumimoji="1" lang="ja-JP" altLang="en-US" smtClean="0"/>
-              <a:t>2025/1/6</a:t>
+              <a:t>2025/3/3</a:t>
             </a:fld>
             <a:endParaRPr kumimoji="1" lang="ja-JP" altLang="en-US"/>
           </a:p>
@@ -1246,7 +1246,7 @@
           <a:p>
             <a:fld id="{E9CC885B-4903-4D54-9A93-00025F12DED9}" type="datetimeFigureOut">
               <a:rPr kumimoji="1" lang="ja-JP" altLang="en-US" smtClean="0"/>
-              <a:t>2025/1/6</a:t>
+              <a:t>2025/3/3</a:t>
             </a:fld>
             <a:endParaRPr kumimoji="1" lang="ja-JP" altLang="en-US"/>
           </a:p>
@@ -1575,7 +1575,7 @@
           <a:p>
             <a:fld id="{E9CC885B-4903-4D54-9A93-00025F12DED9}" type="datetimeFigureOut">
               <a:rPr kumimoji="1" lang="ja-JP" altLang="en-US" smtClean="0"/>
-              <a:t>2025/1/6</a:t>
+              <a:t>2025/3/3</a:t>
             </a:fld>
             <a:endParaRPr kumimoji="1" lang="ja-JP" altLang="en-US"/>
           </a:p>
@@ -2051,7 +2051,7 @@
           <a:p>
             <a:fld id="{E9CC885B-4903-4D54-9A93-00025F12DED9}" type="datetimeFigureOut">
               <a:rPr kumimoji="1" lang="ja-JP" altLang="en-US" smtClean="0"/>
-              <a:t>2025/1/6</a:t>
+              <a:t>2025/3/3</a:t>
             </a:fld>
             <a:endParaRPr kumimoji="1" lang="ja-JP" altLang="en-US"/>
           </a:p>
@@ -2192,7 +2192,7 @@
           <a:p>
             <a:fld id="{E9CC885B-4903-4D54-9A93-00025F12DED9}" type="datetimeFigureOut">
               <a:rPr kumimoji="1" lang="ja-JP" altLang="en-US" smtClean="0"/>
-              <a:t>2025/1/6</a:t>
+              <a:t>2025/3/3</a:t>
             </a:fld>
             <a:endParaRPr kumimoji="1" lang="ja-JP" altLang="en-US"/>
           </a:p>
@@ -2305,7 +2305,7 @@
           <a:p>
             <a:fld id="{E9CC885B-4903-4D54-9A93-00025F12DED9}" type="datetimeFigureOut">
               <a:rPr kumimoji="1" lang="ja-JP" altLang="en-US" smtClean="0"/>
-              <a:t>2025/1/6</a:t>
+              <a:t>2025/3/3</a:t>
             </a:fld>
             <a:endParaRPr kumimoji="1" lang="ja-JP" altLang="en-US"/>
           </a:p>
@@ -2648,7 +2648,7 @@
           <a:p>
             <a:fld id="{E9CC885B-4903-4D54-9A93-00025F12DED9}" type="datetimeFigureOut">
               <a:rPr kumimoji="1" lang="ja-JP" altLang="en-US" smtClean="0"/>
-              <a:t>2025/1/6</a:t>
+              <a:t>2025/3/3</a:t>
             </a:fld>
             <a:endParaRPr kumimoji="1" lang="ja-JP" altLang="en-US"/>
           </a:p>
@@ -2936,7 +2936,7 @@
           <a:p>
             <a:fld id="{E9CC885B-4903-4D54-9A93-00025F12DED9}" type="datetimeFigureOut">
               <a:rPr kumimoji="1" lang="ja-JP" altLang="en-US" smtClean="0"/>
-              <a:t>2025/1/6</a:t>
+              <a:t>2025/3/3</a:t>
             </a:fld>
             <a:endParaRPr kumimoji="1" lang="ja-JP" altLang="en-US"/>
           </a:p>
@@ -3209,7 +3209,7 @@
           <a:p>
             <a:fld id="{E9CC885B-4903-4D54-9A93-00025F12DED9}" type="datetimeFigureOut">
               <a:rPr kumimoji="1" lang="ja-JP" altLang="en-US" smtClean="0"/>
-              <a:t>2025/1/6</a:t>
+              <a:t>2025/3/3</a:t>
             </a:fld>
             <a:endParaRPr kumimoji="1" lang="ja-JP" altLang="en-US"/>
           </a:p>
@@ -3694,7 +3694,11 @@
               <a:t>これまでプログラムはすべて</a:t>
             </a:r>
             <a:r>
-              <a:rPr kumimoji="1" lang="en-US" altLang="ja-JP" sz="2400" dirty="0"/>
+              <a:rPr kumimoji="1" lang="en-US" altLang="ja-JP" sz="2400" b="1" dirty="0">
+                <a:solidFill>
+                  <a:srgbClr val="FF0000"/>
+                </a:solidFill>
+              </a:rPr>
               <a:t>Main.cpp</a:t>
             </a:r>
             <a:r>
@@ -3736,7 +3740,11 @@
           </a:p>
           <a:p>
             <a:r>
-              <a:rPr lang="en-US" altLang="ja-JP" sz="2400" dirty="0"/>
+              <a:rPr lang="en-US" altLang="ja-JP" sz="2400" b="1" dirty="0">
+                <a:solidFill>
+                  <a:srgbClr val="FF0000"/>
+                </a:solidFill>
+              </a:rPr>
               <a:t>Main.cpp</a:t>
             </a:r>
             <a:r>
@@ -4061,7 +4069,7 @@
         <p:spPr>
           <a:xfrm>
             <a:off x="567542" y="1216429"/>
-            <a:ext cx="8130752" cy="830997"/>
+            <a:ext cx="8263801" cy="830997"/>
           </a:xfrm>
           <a:prstGeom prst="rect">
             <a:avLst/>
@@ -4075,7 +4083,11 @@
           <a:lstStyle/>
           <a:p>
             <a:r>
-              <a:rPr lang="en-US" altLang="ja-JP" sz="2400" dirty="0" err="1"/>
+              <a:rPr lang="en-US" altLang="ja-JP" sz="2400" b="1" dirty="0" err="1">
+                <a:solidFill>
+                  <a:srgbClr val="FF0000"/>
+                </a:solidFill>
+              </a:rPr>
               <a:t>GameSetting.h</a:t>
             </a:r>
             <a:r>
@@ -4178,7 +4190,11 @@
           <a:lstStyle/>
           <a:p>
             <a:r>
-              <a:rPr lang="en-US" altLang="ja-JP" sz="2400" dirty="0" err="1"/>
+              <a:rPr lang="en-US" altLang="ja-JP" sz="2400" b="1" dirty="0" err="1">
+                <a:solidFill>
+                  <a:srgbClr val="FF0000"/>
+                </a:solidFill>
+              </a:rPr>
               <a:t>GameSetting.h</a:t>
             </a:r>
             <a:r>
@@ -4543,7 +4559,7 @@
         <p:spPr>
           <a:xfrm>
             <a:off x="567542" y="1216429"/>
-            <a:ext cx="10649069" cy="3416320"/>
+            <a:ext cx="10649069" cy="3046988"/>
           </a:xfrm>
           <a:prstGeom prst="rect">
             <a:avLst/>
@@ -4612,14 +4628,7 @@
           <a:p>
             <a:r>
               <a:rPr lang="ja-JP" altLang="en-US" sz="2400" dirty="0"/>
-              <a:t>初めのうちは、どの単位で分けたりするのか、</a:t>
-            </a:r>
-            <a:endParaRPr lang="en-US" altLang="ja-JP" sz="2400" dirty="0"/>
-          </a:p>
-          <a:p>
-            <a:r>
-              <a:rPr lang="ja-JP" altLang="en-US" sz="2400" dirty="0"/>
-              <a:t>わからないことが多いと思いますが、</a:t>
+              <a:t>初めのうちは分け方がわからないことが多いと思いますが、</a:t>
             </a:r>
             <a:endParaRPr lang="en-US" altLang="ja-JP" sz="2400" dirty="0"/>
           </a:p>
@@ -4782,7 +4791,7 @@
           <a:p>
             <a:r>
               <a:rPr kumimoji="1" lang="ja-JP" altLang="en-US" sz="2400" dirty="0"/>
-              <a:t>その際、フォルダわけも行います。</a:t>
+              <a:t>その際、フォルダ分けも行います。</a:t>
             </a:r>
             <a:endParaRPr kumimoji="1" lang="en-US" altLang="ja-JP" sz="2400" dirty="0"/>
           </a:p>
@@ -6291,7 +6300,7 @@
           <a:lstStyle/>
           <a:p>
             <a:r>
-              <a:rPr lang="en-US" altLang="ja-JP" sz="2400" dirty="0">
+              <a:rPr lang="en-US" altLang="ja-JP" sz="2400" b="1" dirty="0">
                 <a:solidFill>
                   <a:srgbClr val="7030A0"/>
                 </a:solidFill>

--- a/ゲーム科1年/00_前期/ゲームプログラミングⅠ/08_ファイル分け.pptx
+++ b/ゲーム科1年/00_前期/ゲームプログラミングⅠ/08_ファイル分け.pptx
@@ -271,7 +271,7 @@
           <a:p>
             <a:fld id="{E9CC885B-4903-4D54-9A93-00025F12DED9}" type="datetimeFigureOut">
               <a:rPr kumimoji="1" lang="ja-JP" altLang="en-US" smtClean="0"/>
-              <a:t>2025/3/3</a:t>
+              <a:t>2026/6/4</a:t>
             </a:fld>
             <a:endParaRPr kumimoji="1" lang="ja-JP" altLang="en-US"/>
           </a:p>
@@ -501,7 +501,7 @@
           <a:p>
             <a:fld id="{E9CC885B-4903-4D54-9A93-00025F12DED9}" type="datetimeFigureOut">
               <a:rPr kumimoji="1" lang="ja-JP" altLang="en-US" smtClean="0"/>
-              <a:t>2025/3/3</a:t>
+              <a:t>2026/6/4</a:t>
             </a:fld>
             <a:endParaRPr kumimoji="1" lang="ja-JP" altLang="en-US"/>
           </a:p>
@@ -741,7 +741,7 @@
           <a:p>
             <a:fld id="{E9CC885B-4903-4D54-9A93-00025F12DED9}" type="datetimeFigureOut">
               <a:rPr kumimoji="1" lang="ja-JP" altLang="en-US" smtClean="0"/>
-              <a:t>2025/3/3</a:t>
+              <a:t>2026/6/4</a:t>
             </a:fld>
             <a:endParaRPr kumimoji="1" lang="ja-JP" altLang="en-US"/>
           </a:p>
@@ -971,7 +971,7 @@
           <a:p>
             <a:fld id="{E9CC885B-4903-4D54-9A93-00025F12DED9}" type="datetimeFigureOut">
               <a:rPr kumimoji="1" lang="ja-JP" altLang="en-US" smtClean="0"/>
-              <a:t>2025/3/3</a:t>
+              <a:t>2026/6/4</a:t>
             </a:fld>
             <a:endParaRPr kumimoji="1" lang="ja-JP" altLang="en-US"/>
           </a:p>
@@ -1246,7 +1246,7 @@
           <a:p>
             <a:fld id="{E9CC885B-4903-4D54-9A93-00025F12DED9}" type="datetimeFigureOut">
               <a:rPr kumimoji="1" lang="ja-JP" altLang="en-US" smtClean="0"/>
-              <a:t>2025/3/3</a:t>
+              <a:t>2026/6/4</a:t>
             </a:fld>
             <a:endParaRPr kumimoji="1" lang="ja-JP" altLang="en-US"/>
           </a:p>
@@ -1575,7 +1575,7 @@
           <a:p>
             <a:fld id="{E9CC885B-4903-4D54-9A93-00025F12DED9}" type="datetimeFigureOut">
               <a:rPr kumimoji="1" lang="ja-JP" altLang="en-US" smtClean="0"/>
-              <a:t>2025/3/3</a:t>
+              <a:t>2026/6/4</a:t>
             </a:fld>
             <a:endParaRPr kumimoji="1" lang="ja-JP" altLang="en-US"/>
           </a:p>
@@ -2051,7 +2051,7 @@
           <a:p>
             <a:fld id="{E9CC885B-4903-4D54-9A93-00025F12DED9}" type="datetimeFigureOut">
               <a:rPr kumimoji="1" lang="ja-JP" altLang="en-US" smtClean="0"/>
-              <a:t>2025/3/3</a:t>
+              <a:t>2026/6/4</a:t>
             </a:fld>
             <a:endParaRPr kumimoji="1" lang="ja-JP" altLang="en-US"/>
           </a:p>
@@ -2192,7 +2192,7 @@
           <a:p>
             <a:fld id="{E9CC885B-4903-4D54-9A93-00025F12DED9}" type="datetimeFigureOut">
               <a:rPr kumimoji="1" lang="ja-JP" altLang="en-US" smtClean="0"/>
-              <a:t>2025/3/3</a:t>
+              <a:t>2026/6/4</a:t>
             </a:fld>
             <a:endParaRPr kumimoji="1" lang="ja-JP" altLang="en-US"/>
           </a:p>
@@ -2305,7 +2305,7 @@
           <a:p>
             <a:fld id="{E9CC885B-4903-4D54-9A93-00025F12DED9}" type="datetimeFigureOut">
               <a:rPr kumimoji="1" lang="ja-JP" altLang="en-US" smtClean="0"/>
-              <a:t>2025/3/3</a:t>
+              <a:t>2026/6/4</a:t>
             </a:fld>
             <a:endParaRPr kumimoji="1" lang="ja-JP" altLang="en-US"/>
           </a:p>
@@ -2648,7 +2648,7 @@
           <a:p>
             <a:fld id="{E9CC885B-4903-4D54-9A93-00025F12DED9}" type="datetimeFigureOut">
               <a:rPr kumimoji="1" lang="ja-JP" altLang="en-US" smtClean="0"/>
-              <a:t>2025/3/3</a:t>
+              <a:t>2026/6/4</a:t>
             </a:fld>
             <a:endParaRPr kumimoji="1" lang="ja-JP" altLang="en-US"/>
           </a:p>
@@ -2936,7 +2936,7 @@
           <a:p>
             <a:fld id="{E9CC885B-4903-4D54-9A93-00025F12DED9}" type="datetimeFigureOut">
               <a:rPr kumimoji="1" lang="ja-JP" altLang="en-US" smtClean="0"/>
-              <a:t>2025/3/3</a:t>
+              <a:t>2026/6/4</a:t>
             </a:fld>
             <a:endParaRPr kumimoji="1" lang="ja-JP" altLang="en-US"/>
           </a:p>
@@ -3209,7 +3209,7 @@
           <a:p>
             <a:fld id="{E9CC885B-4903-4D54-9A93-00025F12DED9}" type="datetimeFigureOut">
               <a:rPr kumimoji="1" lang="ja-JP" altLang="en-US" smtClean="0"/>
-              <a:t>2025/3/3</a:t>
+              <a:t>2026/6/4</a:t>
             </a:fld>
             <a:endParaRPr kumimoji="1" lang="ja-JP" altLang="en-US"/>
           </a:p>
@@ -3825,7 +3825,7 @@
         <p:spPr>
           <a:xfrm>
             <a:off x="567542" y="491954"/>
-            <a:ext cx="3820277" cy="584775"/>
+            <a:ext cx="2646878" cy="584775"/>
           </a:xfrm>
           <a:prstGeom prst="rect">
             <a:avLst/>
@@ -3840,13 +3840,8 @@
           <a:p>
             <a:r>
               <a:rPr kumimoji="1" lang="ja-JP" altLang="en-US" sz="3200" b="1" u="sng" dirty="0"/>
-              <a:t>ファイル分け 練習</a:t>
-            </a:r>
-            <a:r>
-              <a:rPr kumimoji="1" lang="en-US" altLang="ja-JP" sz="3200" b="1" u="sng" dirty="0"/>
-              <a:t>1</a:t>
-            </a:r>
-            <a:endParaRPr kumimoji="1" lang="ja-JP" altLang="en-US" sz="3200" b="1" u="sng" dirty="0"/>
+              <a:t>ファイル分け</a:t>
+            </a:r>
           </a:p>
         </p:txBody>
       </p:sp>
@@ -4029,7 +4024,7 @@
         <p:spPr>
           <a:xfrm>
             <a:off x="567542" y="491954"/>
-            <a:ext cx="3820277" cy="584775"/>
+            <a:ext cx="2646878" cy="584775"/>
           </a:xfrm>
           <a:prstGeom prst="rect">
             <a:avLst/>
@@ -4044,13 +4039,8 @@
           <a:p>
             <a:r>
               <a:rPr kumimoji="1" lang="ja-JP" altLang="en-US" sz="3200" b="1" u="sng" dirty="0"/>
-              <a:t>ファイル分け 練習</a:t>
-            </a:r>
-            <a:r>
-              <a:rPr kumimoji="1" lang="en-US" altLang="ja-JP" sz="3200" b="1" u="sng" dirty="0"/>
-              <a:t>1</a:t>
-            </a:r>
-            <a:endParaRPr kumimoji="1" lang="ja-JP" altLang="en-US" sz="3200" b="1" u="sng" dirty="0"/>
+              <a:t>ファイル分け</a:t>
+            </a:r>
           </a:p>
         </p:txBody>
       </p:sp>
@@ -4628,7 +4618,7 @@
           <a:p>
             <a:r>
               <a:rPr lang="ja-JP" altLang="en-US" sz="2400" dirty="0"/>
-              <a:t>初めのうちは分け方がわからないことが多いと思いますが、</a:t>
+              <a:t>初めのうちは、分け方がわからないことが多いと思いますが、</a:t>
             </a:r>
             <a:endParaRPr lang="en-US" altLang="ja-JP" sz="2400" dirty="0"/>
           </a:p>
@@ -4686,7 +4676,7 @@
         <p:spPr>
           <a:xfrm>
             <a:off x="567542" y="491954"/>
-            <a:ext cx="3820277" cy="584775"/>
+            <a:ext cx="2646878" cy="584775"/>
           </a:xfrm>
           <a:prstGeom prst="rect">
             <a:avLst/>
@@ -4701,13 +4691,8 @@
           <a:p>
             <a:r>
               <a:rPr kumimoji="1" lang="ja-JP" altLang="en-US" sz="3200" b="1" u="sng" dirty="0"/>
-              <a:t>ファイル分け 練習</a:t>
-            </a:r>
-            <a:r>
-              <a:rPr kumimoji="1" lang="en-US" altLang="ja-JP" sz="3200" b="1" u="sng" dirty="0"/>
-              <a:t>1</a:t>
-            </a:r>
-            <a:endParaRPr kumimoji="1" lang="ja-JP" altLang="en-US" sz="3200" b="1" u="sng" dirty="0"/>
+              <a:t>ファイル分け</a:t>
+            </a:r>
           </a:p>
         </p:txBody>
       </p:sp>
@@ -4946,6 +4931,81 @@
               <a:t>を作成する。</a:t>
             </a:r>
             <a:endParaRPr kumimoji="1" lang="en-US" altLang="ja-JP" sz="2400" dirty="0"/>
+          </a:p>
+        </p:txBody>
+      </p:sp>
+      <p:sp>
+        <p:nvSpPr>
+          <p:cNvPr id="10" name="テキスト ボックス 9">
+            <a:extLst>
+              <a:ext uri="{FF2B5EF4-FFF2-40B4-BE49-F238E27FC236}">
+                <a16:creationId xmlns:a16="http://schemas.microsoft.com/office/drawing/2014/main" id="{17D74EDA-86C1-4C0E-9F2E-E20FAB1205AC}"/>
+              </a:ext>
+            </a:extLst>
+          </p:cNvPr>
+          <p:cNvSpPr txBox="1"/>
+          <p:nvPr/>
+        </p:nvSpPr>
+        <p:spPr>
+          <a:xfrm>
+            <a:off x="4961201" y="4694172"/>
+            <a:ext cx="5827236" cy="1631216"/>
+          </a:xfrm>
+          <a:prstGeom prst="rect">
+            <a:avLst/>
+          </a:prstGeom>
+          <a:noFill/>
+        </p:spPr>
+        <p:txBody>
+          <a:bodyPr wrap="none" rtlCol="0">
+            <a:spAutoFit/>
+          </a:bodyPr>
+          <a:lstStyle/>
+          <a:p>
+            <a:r>
+              <a:rPr kumimoji="1" lang="en-US" altLang="ja-JP" sz="2000" b="1" dirty="0">
+                <a:solidFill>
+                  <a:srgbClr val="00B050"/>
+                </a:solidFill>
+              </a:rPr>
+              <a:t>MEMO</a:t>
+            </a:r>
+          </a:p>
+          <a:p>
+            <a:r>
+              <a:rPr lang="ja-JP" altLang="en-US" sz="2000" dirty="0"/>
+              <a:t>ファイル作成は、</a:t>
+            </a:r>
+            <a:endParaRPr lang="en-US" altLang="ja-JP" sz="2000" dirty="0"/>
+          </a:p>
+          <a:p>
+            <a:r>
+              <a:rPr kumimoji="1" lang="ja-JP" altLang="en-US" sz="2000" dirty="0"/>
+              <a:t>「右クリック→新規作成→テキスト」がおすすめ</a:t>
+            </a:r>
+            <a:endParaRPr kumimoji="1" lang="en-US" altLang="ja-JP" sz="2000" dirty="0"/>
+          </a:p>
+          <a:p>
+            <a:endParaRPr lang="en-US" altLang="ja-JP" sz="2000" dirty="0"/>
+          </a:p>
+          <a:p>
+            <a:r>
+              <a:rPr kumimoji="1" lang="ja-JP" altLang="en-US" sz="2000" dirty="0"/>
+              <a:t>ファイル名は</a:t>
+            </a:r>
+            <a:r>
+              <a:rPr lang="ja-JP" altLang="en-US" sz="2000" dirty="0"/>
+              <a:t>拡張子</a:t>
+            </a:r>
+            <a:r>
+              <a:rPr lang="en-US" altLang="ja-JP" sz="2000" dirty="0"/>
+              <a:t>(.txt)</a:t>
+            </a:r>
+            <a:r>
+              <a:rPr lang="ja-JP" altLang="en-US" sz="2000" dirty="0"/>
+              <a:t>ごと全部書き換えること</a:t>
+            </a:r>
+            <a:endParaRPr kumimoji="1" lang="en-US" altLang="ja-JP" sz="2000" dirty="0"/>
           </a:p>
         </p:txBody>
       </p:sp>
@@ -4994,7 +5054,7 @@
         <p:spPr>
           <a:xfrm>
             <a:off x="567542" y="491954"/>
-            <a:ext cx="3820277" cy="584775"/>
+            <a:ext cx="2646878" cy="584775"/>
           </a:xfrm>
           <a:prstGeom prst="rect">
             <a:avLst/>
@@ -5009,13 +5069,8 @@
           <a:p>
             <a:r>
               <a:rPr kumimoji="1" lang="ja-JP" altLang="en-US" sz="3200" b="1" u="sng" dirty="0"/>
-              <a:t>ファイル分け 練習</a:t>
-            </a:r>
-            <a:r>
-              <a:rPr kumimoji="1" lang="en-US" altLang="ja-JP" sz="3200" b="1" u="sng" dirty="0"/>
-              <a:t>1</a:t>
-            </a:r>
-            <a:endParaRPr kumimoji="1" lang="ja-JP" altLang="en-US" sz="3200" b="1" u="sng" dirty="0"/>
+              <a:t>ファイル分け</a:t>
+            </a:r>
           </a:p>
         </p:txBody>
       </p:sp>
@@ -5191,7 +5246,7 @@
         <p:spPr>
           <a:xfrm>
             <a:off x="567542" y="491954"/>
-            <a:ext cx="3820277" cy="584775"/>
+            <a:ext cx="2646878" cy="584775"/>
           </a:xfrm>
           <a:prstGeom prst="rect">
             <a:avLst/>
@@ -5206,13 +5261,8 @@
           <a:p>
             <a:r>
               <a:rPr kumimoji="1" lang="ja-JP" altLang="en-US" sz="3200" b="1" u="sng" dirty="0"/>
-              <a:t>ファイル分け 練習</a:t>
-            </a:r>
-            <a:r>
-              <a:rPr kumimoji="1" lang="en-US" altLang="ja-JP" sz="3200" b="1" u="sng" dirty="0"/>
-              <a:t>1</a:t>
-            </a:r>
-            <a:endParaRPr kumimoji="1" lang="ja-JP" altLang="en-US" sz="3200" b="1" u="sng" dirty="0"/>
+              <a:t>ファイル分け</a:t>
+            </a:r>
           </a:p>
         </p:txBody>
       </p:sp>
@@ -5333,7 +5383,7 @@
         <p:spPr>
           <a:xfrm>
             <a:off x="567542" y="491954"/>
-            <a:ext cx="3820277" cy="584775"/>
+            <a:ext cx="2646878" cy="584775"/>
           </a:xfrm>
           <a:prstGeom prst="rect">
             <a:avLst/>
@@ -5348,13 +5398,8 @@
           <a:p>
             <a:r>
               <a:rPr kumimoji="1" lang="ja-JP" altLang="en-US" sz="3200" b="1" u="sng" dirty="0"/>
-              <a:t>ファイル分け 練習</a:t>
-            </a:r>
-            <a:r>
-              <a:rPr kumimoji="1" lang="en-US" altLang="ja-JP" sz="3200" b="1" u="sng" dirty="0"/>
-              <a:t>1</a:t>
-            </a:r>
-            <a:endParaRPr kumimoji="1" lang="ja-JP" altLang="en-US" sz="3200" b="1" u="sng" dirty="0"/>
+              <a:t>ファイル分け</a:t>
+            </a:r>
           </a:p>
         </p:txBody>
       </p:sp>
@@ -5569,7 +5614,7 @@
         <p:spPr>
           <a:xfrm>
             <a:off x="567542" y="491954"/>
-            <a:ext cx="3820277" cy="584775"/>
+            <a:ext cx="2646878" cy="584775"/>
           </a:xfrm>
           <a:prstGeom prst="rect">
             <a:avLst/>
@@ -5584,13 +5629,8 @@
           <a:p>
             <a:r>
               <a:rPr kumimoji="1" lang="ja-JP" altLang="en-US" sz="3200" b="1" u="sng" dirty="0"/>
-              <a:t>ファイル分け 練習</a:t>
-            </a:r>
-            <a:r>
-              <a:rPr kumimoji="1" lang="en-US" altLang="ja-JP" sz="3200" b="1" u="sng" dirty="0"/>
-              <a:t>1</a:t>
-            </a:r>
-            <a:endParaRPr kumimoji="1" lang="ja-JP" altLang="en-US" sz="3200" b="1" u="sng" dirty="0"/>
+              <a:t>ファイル分け</a:t>
+            </a:r>
           </a:p>
         </p:txBody>
       </p:sp>
@@ -5752,7 +5792,7 @@
         <p:spPr>
           <a:xfrm>
             <a:off x="567542" y="491954"/>
-            <a:ext cx="3820277" cy="584775"/>
+            <a:ext cx="2646878" cy="584775"/>
           </a:xfrm>
           <a:prstGeom prst="rect">
             <a:avLst/>
@@ -5767,13 +5807,8 @@
           <a:p>
             <a:r>
               <a:rPr kumimoji="1" lang="ja-JP" altLang="en-US" sz="3200" b="1" u="sng" dirty="0"/>
-              <a:t>ファイル分け 練習</a:t>
-            </a:r>
-            <a:r>
-              <a:rPr kumimoji="1" lang="en-US" altLang="ja-JP" sz="3200" b="1" u="sng" dirty="0"/>
-              <a:t>1</a:t>
-            </a:r>
-            <a:endParaRPr kumimoji="1" lang="ja-JP" altLang="en-US" sz="3200" b="1" u="sng" dirty="0"/>
+              <a:t>ファイル分け</a:t>
+            </a:r>
           </a:p>
         </p:txBody>
       </p:sp>
@@ -6081,7 +6116,7 @@
         <p:spPr>
           <a:xfrm>
             <a:off x="567542" y="491954"/>
-            <a:ext cx="3820277" cy="584775"/>
+            <a:ext cx="2646878" cy="584775"/>
           </a:xfrm>
           <a:prstGeom prst="rect">
             <a:avLst/>
@@ -6096,13 +6131,8 @@
           <a:p>
             <a:r>
               <a:rPr kumimoji="1" lang="ja-JP" altLang="en-US" sz="3200" b="1" u="sng" dirty="0"/>
-              <a:t>ファイル分け 練習</a:t>
-            </a:r>
-            <a:r>
-              <a:rPr kumimoji="1" lang="en-US" altLang="ja-JP" sz="3200" b="1" u="sng" dirty="0"/>
-              <a:t>1</a:t>
-            </a:r>
-            <a:endParaRPr kumimoji="1" lang="ja-JP" altLang="en-US" sz="3200" b="1" u="sng" dirty="0"/>
+              <a:t>ファイル分け</a:t>
+            </a:r>
           </a:p>
         </p:txBody>
       </p:sp>
@@ -6135,12 +6165,24 @@
           <a:lstStyle/>
           <a:p>
             <a:r>
-              <a:rPr lang="en-US" altLang="ja-JP" sz="2400" dirty="0"/>
+              <a:rPr lang="en-US" altLang="ja-JP" sz="2400" b="1" dirty="0">
+                <a:solidFill>
+                  <a:srgbClr val="0070C0"/>
+                </a:solidFill>
+              </a:rPr>
               <a:t>Update</a:t>
             </a:r>
             <a:r>
+              <a:rPr lang="ja-JP" altLang="en-US" sz="2400" b="1" dirty="0">
+                <a:solidFill>
+                  <a:srgbClr val="0070C0"/>
+                </a:solidFill>
+              </a:rPr>
+              <a:t>関数</a:t>
+            </a:r>
+            <a:r>
               <a:rPr lang="ja-JP" altLang="en-US" sz="2400" dirty="0"/>
-              <a:t>関数で</a:t>
+              <a:t>で</a:t>
             </a:r>
             <a:r>
               <a:rPr lang="en-US" altLang="ja-JP" sz="2400" dirty="0">
@@ -6246,7 +6288,7 @@
         <p:spPr>
           <a:xfrm>
             <a:off x="567542" y="491954"/>
-            <a:ext cx="3820277" cy="584775"/>
+            <a:ext cx="2646878" cy="584775"/>
           </a:xfrm>
           <a:prstGeom prst="rect">
             <a:avLst/>
@@ -6261,13 +6303,8 @@
           <a:p>
             <a:r>
               <a:rPr kumimoji="1" lang="ja-JP" altLang="en-US" sz="3200" b="1" u="sng" dirty="0"/>
-              <a:t>ファイル分け 練習</a:t>
-            </a:r>
-            <a:r>
-              <a:rPr kumimoji="1" lang="en-US" altLang="ja-JP" sz="3200" b="1" u="sng" dirty="0"/>
-              <a:t>1</a:t>
-            </a:r>
-            <a:endParaRPr kumimoji="1" lang="ja-JP" altLang="en-US" sz="3200" b="1" u="sng" dirty="0"/>
+              <a:t>ファイル分け</a:t>
+            </a:r>
           </a:p>
         </p:txBody>
       </p:sp>

--- a/ゲーム科1年/00_前期/ゲームプログラミングⅠ/08_ファイル分け.pptx
+++ b/ゲーム科1年/00_前期/ゲームプログラミングⅠ/08_ファイル分け.pptx
@@ -271,7 +271,7 @@
           <a:p>
             <a:fld id="{E9CC885B-4903-4D54-9A93-00025F12DED9}" type="datetimeFigureOut">
               <a:rPr kumimoji="1" lang="ja-JP" altLang="en-US" smtClean="0"/>
-              <a:t>2026/6/4</a:t>
+              <a:t>2026/6/22</a:t>
             </a:fld>
             <a:endParaRPr kumimoji="1" lang="ja-JP" altLang="en-US"/>
           </a:p>
@@ -501,7 +501,7 @@
           <a:p>
             <a:fld id="{E9CC885B-4903-4D54-9A93-00025F12DED9}" type="datetimeFigureOut">
               <a:rPr kumimoji="1" lang="ja-JP" altLang="en-US" smtClean="0"/>
-              <a:t>2026/6/4</a:t>
+              <a:t>2026/6/22</a:t>
             </a:fld>
             <a:endParaRPr kumimoji="1" lang="ja-JP" altLang="en-US"/>
           </a:p>
@@ -741,7 +741,7 @@
           <a:p>
             <a:fld id="{E9CC885B-4903-4D54-9A93-00025F12DED9}" type="datetimeFigureOut">
               <a:rPr kumimoji="1" lang="ja-JP" altLang="en-US" smtClean="0"/>
-              <a:t>2026/6/4</a:t>
+              <a:t>2026/6/22</a:t>
             </a:fld>
             <a:endParaRPr kumimoji="1" lang="ja-JP" altLang="en-US"/>
           </a:p>
@@ -971,7 +971,7 @@
           <a:p>
             <a:fld id="{E9CC885B-4903-4D54-9A93-00025F12DED9}" type="datetimeFigureOut">
               <a:rPr kumimoji="1" lang="ja-JP" altLang="en-US" smtClean="0"/>
-              <a:t>2026/6/4</a:t>
+              <a:t>2026/6/22</a:t>
             </a:fld>
             <a:endParaRPr kumimoji="1" lang="ja-JP" altLang="en-US"/>
           </a:p>
@@ -1246,7 +1246,7 @@
           <a:p>
             <a:fld id="{E9CC885B-4903-4D54-9A93-00025F12DED9}" type="datetimeFigureOut">
               <a:rPr kumimoji="1" lang="ja-JP" altLang="en-US" smtClean="0"/>
-              <a:t>2026/6/4</a:t>
+              <a:t>2026/6/22</a:t>
             </a:fld>
             <a:endParaRPr kumimoji="1" lang="ja-JP" altLang="en-US"/>
           </a:p>
@@ -1575,7 +1575,7 @@
           <a:p>
             <a:fld id="{E9CC885B-4903-4D54-9A93-00025F12DED9}" type="datetimeFigureOut">
               <a:rPr kumimoji="1" lang="ja-JP" altLang="en-US" smtClean="0"/>
-              <a:t>2026/6/4</a:t>
+              <a:t>2026/6/22</a:t>
             </a:fld>
             <a:endParaRPr kumimoji="1" lang="ja-JP" altLang="en-US"/>
           </a:p>
@@ -2051,7 +2051,7 @@
           <a:p>
             <a:fld id="{E9CC885B-4903-4D54-9A93-00025F12DED9}" type="datetimeFigureOut">
               <a:rPr kumimoji="1" lang="ja-JP" altLang="en-US" smtClean="0"/>
-              <a:t>2026/6/4</a:t>
+              <a:t>2026/6/22</a:t>
             </a:fld>
             <a:endParaRPr kumimoji="1" lang="ja-JP" altLang="en-US"/>
           </a:p>
@@ -2192,7 +2192,7 @@
           <a:p>
             <a:fld id="{E9CC885B-4903-4D54-9A93-00025F12DED9}" type="datetimeFigureOut">
               <a:rPr kumimoji="1" lang="ja-JP" altLang="en-US" smtClean="0"/>
-              <a:t>2026/6/4</a:t>
+              <a:t>2026/6/22</a:t>
             </a:fld>
             <a:endParaRPr kumimoji="1" lang="ja-JP" altLang="en-US"/>
           </a:p>
@@ -2305,7 +2305,7 @@
           <a:p>
             <a:fld id="{E9CC885B-4903-4D54-9A93-00025F12DED9}" type="datetimeFigureOut">
               <a:rPr kumimoji="1" lang="ja-JP" altLang="en-US" smtClean="0"/>
-              <a:t>2026/6/4</a:t>
+              <a:t>2026/6/22</a:t>
             </a:fld>
             <a:endParaRPr kumimoji="1" lang="ja-JP" altLang="en-US"/>
           </a:p>
@@ -2648,7 +2648,7 @@
           <a:p>
             <a:fld id="{E9CC885B-4903-4D54-9A93-00025F12DED9}" type="datetimeFigureOut">
               <a:rPr kumimoji="1" lang="ja-JP" altLang="en-US" smtClean="0"/>
-              <a:t>2026/6/4</a:t>
+              <a:t>2026/6/22</a:t>
             </a:fld>
             <a:endParaRPr kumimoji="1" lang="ja-JP" altLang="en-US"/>
           </a:p>
@@ -2936,7 +2936,7 @@
           <a:p>
             <a:fld id="{E9CC885B-4903-4D54-9A93-00025F12DED9}" type="datetimeFigureOut">
               <a:rPr kumimoji="1" lang="ja-JP" altLang="en-US" smtClean="0"/>
-              <a:t>2026/6/4</a:t>
+              <a:t>2026/6/22</a:t>
             </a:fld>
             <a:endParaRPr kumimoji="1" lang="ja-JP" altLang="en-US"/>
           </a:p>
@@ -3209,7 +3209,7 @@
           <a:p>
             <a:fld id="{E9CC885B-4903-4D54-9A93-00025F12DED9}" type="datetimeFigureOut">
               <a:rPr kumimoji="1" lang="ja-JP" altLang="en-US" smtClean="0"/>
-              <a:t>2026/6/4</a:t>
+              <a:t>2026/6/22</a:t>
             </a:fld>
             <a:endParaRPr kumimoji="1" lang="ja-JP" altLang="en-US"/>
           </a:p>
@@ -3953,12 +3953,24 @@
           <a:lstStyle/>
           <a:p>
             <a:r>
-              <a:rPr lang="en-US" altLang="ja-JP" sz="2400" dirty="0"/>
+              <a:rPr lang="en-US" altLang="ja-JP" sz="2400" b="1" dirty="0">
+                <a:solidFill>
+                  <a:srgbClr val="7030A0"/>
+                </a:solidFill>
+              </a:rPr>
               <a:t>Visual Studio</a:t>
             </a:r>
             <a:r>
+              <a:rPr lang="ja-JP" altLang="en-US" sz="2400" b="1" dirty="0">
+                <a:solidFill>
+                  <a:srgbClr val="7030A0"/>
+                </a:solidFill>
+              </a:rPr>
+              <a:t>側</a:t>
+            </a:r>
+            <a:r>
               <a:rPr lang="ja-JP" altLang="en-US" sz="2400" dirty="0"/>
-              <a:t>側にも追加しましょう。</a:t>
+              <a:t>にも追加しましょう。</a:t>
             </a:r>
             <a:endParaRPr lang="en-US" altLang="ja-JP" sz="2400" dirty="0"/>
           </a:p>
@@ -4549,7 +4561,7 @@
         <p:spPr>
           <a:xfrm>
             <a:off x="567542" y="1216429"/>
-            <a:ext cx="10649069" cy="3046988"/>
+            <a:ext cx="11264622" cy="3046988"/>
           </a:xfrm>
           <a:prstGeom prst="rect">
             <a:avLst/>
@@ -4601,7 +4613,19 @@
           <a:p>
             <a:r>
               <a:rPr lang="ja-JP" altLang="en-US" sz="2400" dirty="0"/>
-              <a:t>ゲームは最終的に１００個近くのソースファイルを作ることになるので、</a:t>
+              <a:t>ゲームは最終的に</a:t>
+            </a:r>
+            <a:r>
+              <a:rPr lang="ja-JP" altLang="en-US" sz="2400" b="1" dirty="0">
+                <a:solidFill>
+                  <a:srgbClr val="FF0000"/>
+                </a:solidFill>
+              </a:rPr>
+              <a:t>数万～数十万近くのソースファイル</a:t>
+            </a:r>
+            <a:r>
+              <a:rPr lang="ja-JP" altLang="en-US" sz="2400" dirty="0"/>
+              <a:t>を作ることになるので、</a:t>
             </a:r>
             <a:endParaRPr lang="en-US" altLang="ja-JP" sz="2400" dirty="0"/>
           </a:p>
@@ -4618,7 +4642,7 @@
           <a:p>
             <a:r>
               <a:rPr lang="ja-JP" altLang="en-US" sz="2400" dirty="0"/>
-              <a:t>初めのうちは、分け方がわからないことが多いと思いますが、</a:t>
+              <a:t>初めのうちは分け方がわからないことが多いと思いますが、</a:t>
             </a:r>
             <a:endParaRPr lang="en-US" altLang="ja-JP" sz="2400" dirty="0"/>
           </a:p>
@@ -4833,7 +4857,7 @@
         <p:spPr>
           <a:xfrm>
             <a:off x="567541" y="3841078"/>
-            <a:ext cx="4083169" cy="461665"/>
+            <a:ext cx="4134465" cy="461665"/>
           </a:xfrm>
           <a:prstGeom prst="rect">
             <a:avLst/>
@@ -4847,12 +4871,24 @@
           <a:lstStyle/>
           <a:p>
             <a:r>
-              <a:rPr kumimoji="1" lang="en-US" altLang="ja-JP" sz="2400" dirty="0"/>
+              <a:rPr kumimoji="1" lang="en-US" altLang="ja-JP" sz="2400" b="1" dirty="0">
+                <a:solidFill>
+                  <a:srgbClr val="FF0000"/>
+                </a:solidFill>
+              </a:rPr>
               <a:t>Cloud</a:t>
             </a:r>
             <a:r>
+              <a:rPr kumimoji="1" lang="ja-JP" altLang="en-US" sz="2400" b="1" dirty="0">
+                <a:solidFill>
+                  <a:srgbClr val="FF0000"/>
+                </a:solidFill>
+              </a:rPr>
+              <a:t>フォルダ</a:t>
+            </a:r>
+            <a:r>
               <a:rPr kumimoji="1" lang="ja-JP" altLang="en-US" sz="2400" dirty="0"/>
-              <a:t>フォルダを作成して、</a:t>
+              <a:t>を作成して、</a:t>
             </a:r>
             <a:endParaRPr kumimoji="1" lang="en-US" altLang="ja-JP" sz="2400" dirty="0"/>
           </a:p>
@@ -4909,7 +4945,7 @@
         <p:spPr>
           <a:xfrm>
             <a:off x="567540" y="5863723"/>
-            <a:ext cx="3853940" cy="461665"/>
+            <a:ext cx="3969356" cy="461665"/>
           </a:xfrm>
           <a:prstGeom prst="rect">
             <a:avLst/>
@@ -4923,7 +4959,11 @@
           <a:lstStyle/>
           <a:p>
             <a:r>
-              <a:rPr kumimoji="1" lang="en-US" altLang="ja-JP" sz="2400" dirty="0"/>
+              <a:rPr kumimoji="1" lang="en-US" altLang="ja-JP" sz="2400" b="1" dirty="0">
+                <a:solidFill>
+                  <a:srgbClr val="FF0000"/>
+                </a:solidFill>
+              </a:rPr>
               <a:t>Cloud.cpp/.h</a:t>
             </a:r>
             <a:r>
@@ -5103,12 +5143,24 @@
           <a:lstStyle/>
           <a:p>
             <a:r>
-              <a:rPr kumimoji="1" lang="en-US" altLang="ja-JP" sz="2400" dirty="0"/>
+              <a:rPr kumimoji="1" lang="en-US" altLang="ja-JP" sz="2400" b="1" dirty="0">
+                <a:solidFill>
+                  <a:srgbClr val="7030A0"/>
+                </a:solidFill>
+              </a:rPr>
               <a:t>Visual Studio</a:t>
             </a:r>
             <a:r>
+              <a:rPr kumimoji="1" lang="ja-JP" altLang="en-US" sz="2400" b="1" dirty="0">
+                <a:solidFill>
+                  <a:srgbClr val="7030A0"/>
+                </a:solidFill>
+              </a:rPr>
+              <a:t>側</a:t>
+            </a:r>
+            <a:r>
               <a:rPr kumimoji="1" lang="ja-JP" altLang="en-US" sz="2400" dirty="0"/>
-              <a:t>側に追加する際は、</a:t>
+              <a:t>に追加する際は、</a:t>
             </a:r>
             <a:endParaRPr kumimoji="1" lang="en-US" altLang="ja-JP" sz="2400" dirty="0"/>
           </a:p>
@@ -5418,7 +5470,7 @@
         <p:spPr>
           <a:xfrm>
             <a:off x="567542" y="1216429"/>
-            <a:ext cx="6372257" cy="4154984"/>
+            <a:ext cx="9419566" cy="5262979"/>
           </a:xfrm>
           <a:prstGeom prst="rect">
             <a:avLst/>
@@ -5561,11 +5613,43 @@
               </a:rPr>
               <a:t>宣言されたものを使うことができます。</a:t>
             </a:r>
+            <a:endParaRPr lang="en-US" altLang="ja-JP" sz="2400" b="1" dirty="0">
+              <a:solidFill>
+                <a:srgbClr val="FF0000"/>
+              </a:solidFill>
+            </a:endParaRPr>
+          </a:p>
+          <a:p>
             <a:endParaRPr kumimoji="1" lang="en-US" altLang="ja-JP" sz="2400" b="1" dirty="0">
               <a:solidFill>
                 <a:srgbClr val="FF0000"/>
               </a:solidFill>
             </a:endParaRPr>
+          </a:p>
+          <a:p>
+            <a:r>
+              <a:rPr lang="en-US" altLang="ja-JP" sz="2400" b="1" dirty="0">
+                <a:solidFill>
+                  <a:srgbClr val="00B050"/>
+                </a:solidFill>
+              </a:rPr>
+              <a:t>MEMO</a:t>
+            </a:r>
+          </a:p>
+          <a:p>
+            <a:r>
+              <a:rPr lang="ja-JP" altLang="en-US" sz="2400" dirty="0"/>
+              <a:t>逆に外部に漏れてほしくないものは</a:t>
+            </a:r>
+            <a:r>
+              <a:rPr lang="en-US" altLang="ja-JP" sz="2400" dirty="0"/>
+              <a:t>CPP</a:t>
+            </a:r>
+            <a:r>
+              <a:rPr lang="ja-JP" altLang="en-US" sz="2400" dirty="0"/>
+              <a:t>に書いたほうが良いです。</a:t>
+            </a:r>
+            <a:endParaRPr kumimoji="1" lang="en-US" altLang="ja-JP" sz="2400" dirty="0"/>
           </a:p>
         </p:txBody>
       </p:sp>
@@ -5966,26 +6050,50 @@
           </a:p>
           <a:p>
             <a:r>
-              <a:rPr lang="ja-JP" altLang="en-US" sz="2400" dirty="0"/>
+              <a:rPr lang="ja-JP" altLang="en-US" sz="2400" b="1" dirty="0">
+                <a:solidFill>
+                  <a:srgbClr val="FF0000"/>
+                </a:solidFill>
+              </a:rPr>
               <a:t>■</a:t>
             </a:r>
             <a:r>
-              <a:rPr lang="en-US" altLang="ja-JP" sz="2400" dirty="0"/>
+              <a:rPr lang="en-US" altLang="ja-JP" sz="2400" b="1" dirty="0">
+                <a:solidFill>
+                  <a:srgbClr val="FF0000"/>
+                </a:solidFill>
+              </a:rPr>
               <a:t>Init</a:t>
             </a:r>
             <a:r>
-              <a:rPr lang="ja-JP" altLang="en-US" sz="2400" dirty="0"/>
+              <a:rPr lang="ja-JP" altLang="en-US" sz="2400" b="1" dirty="0">
+                <a:solidFill>
+                  <a:srgbClr val="FF0000"/>
+                </a:solidFill>
+              </a:rPr>
               <a:t>の場合（</a:t>
             </a:r>
             <a:r>
-              <a:rPr lang="en-US" altLang="ja-JP" sz="2400" dirty="0"/>
+              <a:rPr lang="en-US" altLang="ja-JP" sz="2400" b="1" dirty="0">
+                <a:solidFill>
+                  <a:srgbClr val="FF0000"/>
+                </a:solidFill>
+              </a:rPr>
               <a:t>Main.cpp</a:t>
             </a:r>
             <a:r>
-              <a:rPr lang="ja-JP" altLang="en-US" sz="2400" dirty="0"/>
+              <a:rPr lang="ja-JP" altLang="en-US" sz="2400" b="1" dirty="0">
+                <a:solidFill>
+                  <a:srgbClr val="FF0000"/>
+                </a:solidFill>
+              </a:rPr>
               <a:t>）</a:t>
             </a:r>
-            <a:endParaRPr lang="en-US" altLang="ja-JP" sz="2400" dirty="0"/>
+            <a:endParaRPr lang="en-US" altLang="ja-JP" sz="2400" b="1" dirty="0">
+              <a:solidFill>
+                <a:srgbClr val="FF0000"/>
+              </a:solidFill>
+            </a:endParaRPr>
           </a:p>
         </p:txBody>
       </p:sp>
@@ -6151,7 +6259,7 @@
         <p:spPr>
           <a:xfrm>
             <a:off x="567542" y="1216429"/>
-            <a:ext cx="6702476" cy="830997"/>
+            <a:ext cx="6846746" cy="830997"/>
           </a:xfrm>
           <a:prstGeom prst="rect">
             <a:avLst/>
@@ -6185,7 +6293,7 @@
               <a:t>で</a:t>
             </a:r>
             <a:r>
-              <a:rPr lang="en-US" altLang="ja-JP" sz="2400" dirty="0">
+              <a:rPr lang="en-US" altLang="ja-JP" sz="2400" b="1" dirty="0">
                 <a:solidFill>
                   <a:srgbClr val="7030A0"/>
                 </a:solidFill>
